--- a/dist/초1/사회·역사/나와학교/초1_사회·역사_나와학교_01_학교의장소와사람들_학생용.pptx
+++ b/dist/초1/사회·역사/나와학교/초1_사회·역사_나와학교_01_학교의장소와사람들_학생용.pptx
@@ -120,20 +120,20 @@
   <p:extLst>
     <p:ext uri="{521415D9-36F7-43E2-AB2F-B90AF26B5E84}">
       <p14:sectionLst xmlns:p14="http://schemas.microsoft.com/office/powerpoint/2010/main">
-        <p14:section name="도입" id="{5a3553e9-c3d3-6c11-f40a-1c61dd655fa9}">
+        <p14:section name="도입" id="{968bf534-a64f-69d7-e077-a14c8b87b62f}">
           <p14:sldIdLst>
             <p14:sldId id="256"/>
             <p14:sldId id="257"/>
           </p14:sldIdLst>
         </p14:section>
-        <p14:section name="개념" id="{23548401-2b4c-fe79-10a5-dea7b3f2d78f}">
+        <p14:section name="개념" id="{7e890073-7a04-b471-9e58-d0aca5efeac4}">
           <p14:sldIdLst>
             <p14:sldId id="258"/>
             <p14:sldId id="259"/>
             <p14:sldId id="261"/>
           </p14:sldIdLst>
         </p14:section>
-        <p14:section name="연습" id="{5e353960-ecce-69d3-21e6-e05bdd309e8b}">
+        <p14:section name="연습" id="{c945cb0e-4fa5-0110-8da8-6e5cead328e5}">
           <p14:sldIdLst>
             <p14:sldId id="260"/>
             <p14:sldId id="262"/>
@@ -141,25 +141,25 @@
             <p14:sldId id="264"/>
           </p14:sldIdLst>
         </p14:section>
-        <p14:section name="개념" id="{108f8b25-7a3b-9b82-1983-ab7ec277eaa3}">
+        <p14:section name="개념" id="{a3a38be7-f6b5-9c3b-bb38-4af077fcaca8}">
           <p14:sldIdLst/>
         </p14:section>
-        <p14:section name="연습" id="{4c81e4d6-b4f5-c962-ad4b-76533eff167a}">
+        <p14:section name="연습" id="{644ec959-cd74-f5b3-5098-766c30840348}">
           <p14:sldIdLst/>
         </p14:section>
-        <p14:section name="확인" id="{18505e3d-6d2e-b36f-e9f1-58ceddd57445}">
+        <p14:section name="확인" id="{3fa7c1a0-a3b3-081e-0c21-b29be17b816c}">
           <p14:sldIdLst>
             <p14:sldId id="265"/>
             <p14:sldId id="266"/>
             <p14:sldId id="267"/>
           </p14:sldIdLst>
         </p14:section>
-        <p14:section name="정리" id="{0fba0d18-e548-d4f0-3235-7b6e5b412b82}">
+        <p14:section name="정리" id="{92f4decf-f623-b9fb-3f0e-00add1f2c1a9}">
           <p14:sldIdLst>
             <p14:sldId id="268"/>
           </p14:sldIdLst>
         </p14:section>
-        <p14:section name="보충" id="{58321362-39b6-95c8-3a4a-fc7927e9ade4}">
+        <p14:section name="보충" id="{67f3e10d-5c93-f81d-adfa-c844f38bc0fc}">
           <p14:sldIdLst>
             <p14:sldId id="269"/>
           </p14:sldIdLst>
